--- a/outputs/國語第一課_直行本四格段落繪圖示範簡報.pptx
+++ b/outputs/國語第一課_直行本四格段落繪圖示範簡報.pptx
@@ -3147,14 +3147,14 @@
         </p:nvSpPr>
         <p:spPr>
           <a:xfrm>
-            <a:off x="1371600" y="914400"/>
-            <a:ext cx="9448495" cy="5029200"/>
+            <a:off x="1371600" y="1097280"/>
+            <a:ext cx="9448495" cy="4663440"/>
           </a:xfrm>
           <a:prstGeom prst="roundRect">
             <a:avLst/>
           </a:prstGeom>
           <a:solidFill>
-            <a:srgbClr val="1C2541"/>
+            <a:srgbClr val="182038"/>
           </a:solidFill>
           <a:ln w="31750">
             <a:solidFill>
@@ -3198,38 +3198,38 @@
           <a:p>
             <a:pPr algn="ctr">
               <a:spcAft>
+                <a:spcPts val="1800"/>
+              </a:spcAft>
+              <a:defRPr sz="3600" b="1">
+                <a:solidFill>
+                  <a:srgbClr val="FFB703"/>
+                </a:solidFill>
+                <a:latin typeface="微軟正黑體"/>
+              </a:defRPr>
+            </a:pPr>
+            <a:r>
+              <a:t>🎨 讀課文 ➔ 抓重點 ➔ 畫四格</a:t>
+            </a:r>
+          </a:p>
+          <a:p>
+            <a:pPr algn="ctr">
+              <a:spcAft>
                 <a:spcPts val="1600"/>
               </a:spcAft>
-              <a:defRPr sz="3600" b="1">
-                <a:solidFill>
-                  <a:srgbClr val="FFB703"/>
-                </a:solidFill>
-                <a:latin typeface="微軟正黑體"/>
-              </a:defRPr>
-            </a:pPr>
-            <a:r>
-              <a:t>🎨 國語直行本「段落四格圖文筆記」創作</a:t>
+              <a:defRPr sz="2200" b="1">
+                <a:solidFill>
+                  <a:srgbClr val="FFFFFF"/>
+                </a:solidFill>
+                <a:latin typeface="微軟正黑體"/>
+              </a:defRPr>
+            </a:pPr>
+            <a:r>
+              <a:t>① 找角色與動作  ➔  ② 找背景  ➔  ③ 畫上去！</a:t>
             </a:r>
           </a:p>
           <a:p>
             <a:pPr algn="ctr">
-              <a:spcAft>
-                <a:spcPts val="2000"/>
-              </a:spcAft>
-              <a:defRPr sz="1800" b="1">
-                <a:solidFill>
-                  <a:srgbClr val="FFFFFF"/>
-                </a:solidFill>
-                <a:latin typeface="微軟正黑體"/>
-              </a:defRPr>
-            </a:pPr>
-            <a:r>
-              <a:t>動動小手折四格 • 一段一圖畫重點 • 寫下專屬自我介紹！</a:t>
-            </a:r>
-          </a:p>
-          <a:p>
-            <a:pPr algn="ctr">
-              <a:defRPr sz="1600">
+              <a:defRPr sz="1500">
                 <a:solidFill>
                   <a:srgbClr val="94A3B8"/>
                 </a:solidFill>
@@ -3237,7 +3237,7 @@
               </a:defRPr>
             </a:pPr>
             <a:r>
-              <a:t>☀️ 太陽 ｜ 🐦 小雲雀 ｜ 🌬️ 風 ｜ 👦 小豆子</a:t>
+              <a:t>直行本折四格 • 不需要太多細節 • 抓住重點就能畫很棒！</a:t>
             </a:r>
           </a:p>
         </p:txBody>
@@ -3336,7 +3336,7 @@
               </a:defRPr>
             </a:pPr>
             <a:r>
-              <a:t>【事前準備】如何將本子變成美麗的四格畫布？</a:t>
+              <a:t>【繪圖三部曲】先讀懂，再動筆</a:t>
             </a:r>
           </a:p>
         </p:txBody>
@@ -3372,7 +3372,7 @@
               </a:defRPr>
             </a:pPr>
             <a:r>
-              <a:t>📐 步驟一：國語直行本「四格折紙與版面佈局」</a:t>
+              <a:t>💡 每一格怎麼畫？只要簡單三步驟！</a:t>
             </a:r>
           </a:p>
         </p:txBody>
@@ -3385,136 +3385,14 @@
         </p:nvSpPr>
         <p:spPr>
           <a:xfrm>
-            <a:off x="731520" y="1371600"/>
-            <a:ext cx="5120640" cy="4937760"/>
+            <a:off x="731520" y="1463040"/>
+            <a:ext cx="3474720" cy="4572000"/>
           </a:xfrm>
           <a:prstGeom prst="roundRect">
             <a:avLst/>
           </a:prstGeom>
           <a:solidFill>
-            <a:srgbClr val="1C2541"/>
-          </a:solidFill>
-          <a:ln w="25400">
-            <a:solidFill>
-              <a:srgbClr val="C084FC"/>
-            </a:solidFill>
-          </a:ln>
-        </p:spPr>
-        <p:style>
-          <a:lnRef idx="1">
-            <a:schemeClr val="accent1"/>
-          </a:lnRef>
-          <a:fillRef idx="3">
-            <a:schemeClr val="accent1"/>
-          </a:fillRef>
-          <a:effectRef idx="2">
-            <a:schemeClr val="accent1"/>
-          </a:effectRef>
-          <a:fontRef idx="minor">
-            <a:schemeClr val="lt1"/>
-          </a:fontRef>
-        </p:style>
-        <p:txBody>
-          <a:bodyPr rtlCol="0" anchor="ctr" wrap="square"/>
-          <a:lstStyle/>
-          <a:p>
-            <a:pPr algn="ctr">
-              <a:spcAft>
-                <a:spcPts val="1200"/>
-              </a:spcAft>
-              <a:defRPr sz="2000" b="1">
-                <a:solidFill>
-                  <a:srgbClr val="FFB703"/>
-                </a:solidFill>
-                <a:latin typeface="微軟正黑體"/>
-              </a:defRPr>
-            </a:pPr>
-            <a:r>
-              <a:t>📖 直行本折紙三步驟：</a:t>
-            </a:r>
-          </a:p>
-          <a:p>
-            <a:pPr>
-              <a:spcAft>
-                <a:spcPts val="1000"/>
-              </a:spcAft>
-              <a:defRPr sz="1400">
-                <a:solidFill>
-                  <a:srgbClr val="FFFFFF"/>
-                </a:solidFill>
-                <a:latin typeface="微軟正黑體"/>
-              </a:defRPr>
-            </a:pPr>
-            <a:r>
-              <a:t>1. 打開直行本全新跨頁（或單頁），左右對齊向中間折一半，壓出【垂直中線】。</a:t>
-            </a:r>
-          </a:p>
-          <a:p>
-            <a:pPr>
-              <a:spcAft>
-                <a:spcPts val="1000"/>
-              </a:spcAft>
-              <a:defRPr sz="1400">
-                <a:solidFill>
-                  <a:srgbClr val="FFFFFF"/>
-                </a:solidFill>
-                <a:latin typeface="微軟正黑體"/>
-              </a:defRPr>
-            </a:pPr>
-            <a:r>
-              <a:t>2. 上下對齊再折一半，壓出【水平中線】。</a:t>
-            </a:r>
-          </a:p>
-          <a:p>
-            <a:pPr>
-              <a:spcAft>
-                <a:spcPts val="1000"/>
-              </a:spcAft>
-              <a:defRPr sz="1400">
-                <a:solidFill>
-                  <a:srgbClr val="FFFFFF"/>
-                </a:solidFill>
-                <a:latin typeface="微軟正黑體"/>
-              </a:defRPr>
-            </a:pPr>
-            <a:r>
-              <a:t>3. 攤開本子，用尺和黑筆沿著折痕畫十字線，完美分成【四大格】！</a:t>
-            </a:r>
-          </a:p>
-          <a:p>
-            <a:pPr>
-              <a:spcAft>
-                <a:spcPts val="1000"/>
-              </a:spcAft>
-              <a:defRPr sz="1400">
-                <a:solidFill>
-                  <a:srgbClr val="FFFFFF"/>
-                </a:solidFill>
-                <a:latin typeface="微軟正黑體"/>
-              </a:defRPr>
-            </a:pPr>
-            <a:r>
-              <a:t>4. 每格上方 3/4 畫圖，下方保留 2~3 行直行格子寫課文句子。</a:t>
-            </a:r>
-          </a:p>
-        </p:txBody>
-      </p:sp>
-      <p:sp>
-        <p:nvSpPr>
-          <p:cNvPr id="6" name="Rounded Rectangle 5"/>
-          <p:cNvSpPr/>
-          <p:nvPr/>
-        </p:nvSpPr>
-        <p:spPr>
-          <a:xfrm>
-            <a:off x="6217920" y="1371600"/>
-            <a:ext cx="5212080" cy="4937760"/>
-          </a:xfrm>
-          <a:prstGeom prst="roundRect">
-            <a:avLst/>
-          </a:prstGeom>
-          <a:solidFill>
-            <a:srgbClr val="0F172A"/>
+            <a:srgbClr val="182038"/>
           </a:solidFill>
           <a:ln w="25400">
             <a:solidFill>
@@ -3544,7 +3422,18 @@
               <a:spcAft>
                 <a:spcPts val="1000"/>
               </a:spcAft>
-              <a:defRPr sz="1800" b="1">
+              <a:defRPr sz="3600"/>
+            </a:pPr>
+            <a:r>
+              <a:t>👤＋🏃</a:t>
+            </a:r>
+          </a:p>
+          <a:p>
+            <a:pPr algn="ctr">
+              <a:spcAft>
+                <a:spcPts val="1600"/>
+              </a:spcAft>
+              <a:defRPr sz="2000" b="1">
                 <a:solidFill>
                   <a:srgbClr val="38BDF8"/>
                 </a:solidFill>
@@ -3552,15 +3441,88 @@
               </a:defRPr>
             </a:pPr>
             <a:r>
-              <a:t>🖼️ 直行本四格版面分配：</a:t>
-            </a:r>
-          </a:p>
-          <a:p>
-            <a:pPr>
+              <a:t>步驟 1：找角色＋動作</a:t>
+            </a:r>
+          </a:p>
+          <a:p>
+            <a:pPr algn="ctr">
+              <a:spcBef>
+                <a:spcPts val="800"/>
+              </a:spcBef>
+              <a:defRPr sz="1500">
+                <a:solidFill>
+                  <a:srgbClr val="FFFFFF"/>
+                </a:solidFill>
+                <a:latin typeface="微軟正黑體"/>
+              </a:defRPr>
+            </a:pPr>
+            <a:r>
+              <a:t>🔍 誰是主角？他在做什麼？</a:t>
+            </a:r>
+            <a:br/>
+            <a:r>
+              <a:t>（例如：太陽伸出手、拍拍小草）</a:t>
+            </a:r>
+          </a:p>
+        </p:txBody>
+      </p:sp>
+      <p:sp>
+        <p:nvSpPr>
+          <p:cNvPr id="6" name="Rounded Rectangle 5"/>
+          <p:cNvSpPr/>
+          <p:nvPr/>
+        </p:nvSpPr>
+        <p:spPr>
+          <a:xfrm>
+            <a:off x="4343400" y="1463040"/>
+            <a:ext cx="3474720" cy="4572000"/>
+          </a:xfrm>
+          <a:prstGeom prst="roundRect">
+            <a:avLst/>
+          </a:prstGeom>
+          <a:solidFill>
+            <a:srgbClr val="182038"/>
+          </a:solidFill>
+          <a:ln w="25400">
+            <a:solidFill>
+              <a:srgbClr val="FFB703"/>
+            </a:solidFill>
+          </a:ln>
+        </p:spPr>
+        <p:style>
+          <a:lnRef idx="1">
+            <a:schemeClr val="accent1"/>
+          </a:lnRef>
+          <a:fillRef idx="3">
+            <a:schemeClr val="accent1"/>
+          </a:fillRef>
+          <a:effectRef idx="2">
+            <a:schemeClr val="accent1"/>
+          </a:effectRef>
+          <a:fontRef idx="minor">
+            <a:schemeClr val="lt1"/>
+          </a:fontRef>
+        </p:style>
+        <p:txBody>
+          <a:bodyPr rtlCol="0" anchor="ctr" wrap="square"/>
+          <a:lstStyle/>
+          <a:p>
+            <a:pPr algn="ctr">
               <a:spcAft>
-                <a:spcPts val="400"/>
+                <a:spcPts val="1000"/>
               </a:spcAft>
-              <a:defRPr sz="1300">
+              <a:defRPr sz="3600"/>
+            </a:pPr>
+            <a:r>
+              <a:t>🌄＋🌈</a:t>
+            </a:r>
+          </a:p>
+          <a:p>
+            <a:pPr algn="ctr">
+              <a:spcAft>
+                <a:spcPts val="1600"/>
+              </a:spcAft>
+              <a:defRPr sz="2000" b="1">
                 <a:solidFill>
                   <a:srgbClr val="FFB703"/>
                 </a:solidFill>
@@ -3568,119 +3530,116 @@
               </a:defRPr>
             </a:pPr>
             <a:r>
-              <a:t>【第 1 格】（右上或左上）：☀️ 熱情的太陽</a:t>
-            </a:r>
-          </a:p>
-          <a:p>
-            <a:pPr>
+              <a:t>步驟 2：找背景</a:t>
+            </a:r>
+          </a:p>
+          <a:p>
+            <a:pPr algn="ctr">
+              <a:spcBef>
+                <a:spcPts val="800"/>
+              </a:spcBef>
+              <a:defRPr sz="1500">
+                <a:solidFill>
+                  <a:srgbClr val="FFFFFF"/>
+                </a:solidFill>
+                <a:latin typeface="微軟正黑體"/>
+              </a:defRPr>
+            </a:pPr>
+            <a:r>
+              <a:t>🏞️ 他在哪裡？周圍有什麼？</a:t>
+            </a:r>
+            <a:br/>
+            <a:r>
+              <a:t>（例如：泥土、彩虹、大海）</a:t>
+            </a:r>
+          </a:p>
+        </p:txBody>
+      </p:sp>
+      <p:sp>
+        <p:nvSpPr>
+          <p:cNvPr id="7" name="Rounded Rectangle 6"/>
+          <p:cNvSpPr/>
+          <p:nvPr/>
+        </p:nvSpPr>
+        <p:spPr>
+          <a:xfrm>
+            <a:off x="7955280" y="1463040"/>
+            <a:ext cx="3474720" cy="4572000"/>
+          </a:xfrm>
+          <a:prstGeom prst="roundRect">
+            <a:avLst/>
+          </a:prstGeom>
+          <a:solidFill>
+            <a:srgbClr val="182038"/>
+          </a:solidFill>
+          <a:ln w="25400">
+            <a:solidFill>
+              <a:srgbClr val="34D399"/>
+            </a:solidFill>
+          </a:ln>
+        </p:spPr>
+        <p:style>
+          <a:lnRef idx="1">
+            <a:schemeClr val="accent1"/>
+          </a:lnRef>
+          <a:fillRef idx="3">
+            <a:schemeClr val="accent1"/>
+          </a:fillRef>
+          <a:effectRef idx="2">
+            <a:schemeClr val="accent1"/>
+          </a:effectRef>
+          <a:fontRef idx="minor">
+            <a:schemeClr val="lt1"/>
+          </a:fontRef>
+        </p:style>
+        <p:txBody>
+          <a:bodyPr rtlCol="0" anchor="ctr" wrap="square"/>
+          <a:lstStyle/>
+          <a:p>
+            <a:pPr algn="ctr">
               <a:spcAft>
-                <a:spcPts val="400"/>
+                <a:spcPts val="1000"/>
               </a:spcAft>
-              <a:defRPr sz="1300">
-                <a:solidFill>
-                  <a:srgbClr val="94A3B8"/>
-                </a:solidFill>
-                <a:latin typeface="微軟正黑體"/>
-              </a:defRPr>
-            </a:pPr>
-            <a:r>
-              <a:t>  ➔ 畫太陽伸暖手拍小草 ＋ 寫「我是太陽...」</a:t>
-            </a:r>
-          </a:p>
-          <a:p>
-            <a:pPr>
+              <a:defRPr sz="3600"/>
+            </a:pPr>
+            <a:r>
+              <a:t>🎨＋✍️</a:t>
+            </a:r>
+          </a:p>
+          <a:p>
+            <a:pPr algn="ctr">
               <a:spcAft>
-                <a:spcPts val="400"/>
+                <a:spcPts val="1600"/>
               </a:spcAft>
-              <a:defRPr sz="1300">
-                <a:solidFill>
-                  <a:srgbClr val="FFB703"/>
-                </a:solidFill>
-                <a:latin typeface="微軟正黑體"/>
-              </a:defRPr>
-            </a:pPr>
-            <a:r>
-              <a:t>【第 2 格】（右下或左下）：🐦 唱歌的小雲雀</a:t>
-            </a:r>
-          </a:p>
-          <a:p>
-            <a:pPr>
-              <a:spcAft>
-                <a:spcPts val="400"/>
-              </a:spcAft>
-              <a:defRPr sz="1300">
-                <a:solidFill>
-                  <a:srgbClr val="94A3B8"/>
-                </a:solidFill>
-                <a:latin typeface="微軟正黑體"/>
-              </a:defRPr>
-            </a:pPr>
-            <a:r>
-              <a:t>  ➔ 畫小雲雀飛青山半空 ＋ 寫「我是小雲雀...」</a:t>
-            </a:r>
-          </a:p>
-          <a:p>
-            <a:pPr>
-              <a:spcAft>
-                <a:spcPts val="400"/>
-              </a:spcAft>
-              <a:defRPr sz="1300">
-                <a:solidFill>
-                  <a:srgbClr val="FFB703"/>
-                </a:solidFill>
-                <a:latin typeface="微軟正黑體"/>
-              </a:defRPr>
-            </a:pPr>
-            <a:r>
-              <a:t>【第 3 格】（右上或第二頁上）：🌬️ 旅行的風</a:t>
-            </a:r>
-          </a:p>
-          <a:p>
-            <a:pPr>
-              <a:spcAft>
-                <a:spcPts val="400"/>
-              </a:spcAft>
-              <a:defRPr sz="1300">
-                <a:solidFill>
-                  <a:srgbClr val="94A3B8"/>
-                </a:solidFill>
-                <a:latin typeface="微軟正黑體"/>
-              </a:defRPr>
-            </a:pPr>
-            <a:r>
-              <a:t>  ➔ 畫風接住落葉看綿羊 ＋ 寫「我是風...」</a:t>
-            </a:r>
-          </a:p>
-          <a:p>
-            <a:pPr>
-              <a:spcAft>
-                <a:spcPts val="400"/>
-              </a:spcAft>
-              <a:defRPr sz="1300">
-                <a:solidFill>
-                  <a:srgbClr val="FFB703"/>
-                </a:solidFill>
-                <a:latin typeface="微軟正黑體"/>
-              </a:defRPr>
-            </a:pPr>
-            <a:r>
-              <a:t>【第 4 格】（右下或第二頁下）：👦 開朗的小豆子</a:t>
-            </a:r>
-          </a:p>
-          <a:p>
-            <a:pPr>
-              <a:spcAft>
-                <a:spcPts val="400"/>
-              </a:spcAft>
-              <a:defRPr sz="1300">
-                <a:solidFill>
-                  <a:srgbClr val="94A3B8"/>
-                </a:solidFill>
-                <a:latin typeface="微軟正黑體"/>
-              </a:defRPr>
-            </a:pPr>
-            <a:r>
-              <a:t>  ➔ 畫小豆子快樂踢足球 ＋ 寫「我是開朗的...」</a:t>
+              <a:defRPr sz="2000" b="1">
+                <a:solidFill>
+                  <a:srgbClr val="34D399"/>
+                </a:solidFill>
+                <a:latin typeface="微軟正黑體"/>
+              </a:defRPr>
+            </a:pPr>
+            <a:r>
+              <a:t>步驟 3：畫上去</a:t>
+            </a:r>
+          </a:p>
+          <a:p>
+            <a:pPr algn="ctr">
+              <a:spcBef>
+                <a:spcPts val="800"/>
+              </a:spcBef>
+              <a:defRPr sz="1500">
+                <a:solidFill>
+                  <a:srgbClr val="FFFFFF"/>
+                </a:solidFill>
+                <a:latin typeface="微軟正黑體"/>
+              </a:defRPr>
+            </a:pPr>
+            <a:r>
+              <a:t>✏️ 動筆畫在直行本！</a:t>
+            </a:r>
+            <a:br/>
+            <a:r>
+              <a:t>先畫角色動作，再補上背景！</a:t>
             </a:r>
           </a:p>
         </p:txBody>
@@ -3779,7 +3738,7 @@
               </a:defRPr>
             </a:pPr>
             <a:r>
-              <a:t>【第一段創作示範】感受陽光的溫暖與熱情</a:t>
+              <a:t>【第 1 格】找角色 ➔ 找動作 ➔ 找背景 ➔ 畫上去</a:t>
             </a:r>
           </a:p>
         </p:txBody>
@@ -3815,7 +3774,7 @@
               </a:defRPr>
             </a:pPr>
             <a:r>
-              <a:t>☀️ 第 1 格示範：熱情的太陽與泥土小草</a:t>
+              <a:t>☀️ 第一段：太陽拍小草</a:t>
             </a:r>
           </a:p>
         </p:txBody>
@@ -3837,7 +3796,7 @@
         <p:spPr>
           <a:xfrm>
             <a:off x="731520" y="1280160"/>
-            <a:ext cx="5120640" cy="3823411"/>
+            <a:ext cx="4937760" cy="3686861"/>
           </a:xfrm>
           <a:prstGeom prst="rect">
             <a:avLst/>
@@ -3852,14 +3811,14 @@
         </p:nvSpPr>
         <p:spPr>
           <a:xfrm>
-            <a:off x="6126480" y="1280160"/>
-            <a:ext cx="5303520" cy="5029200"/>
+            <a:off x="5943600" y="1280160"/>
+            <a:ext cx="5486400" cy="5029200"/>
           </a:xfrm>
           <a:prstGeom prst="roundRect">
             <a:avLst/>
           </a:prstGeom>
           <a:solidFill>
-            <a:srgbClr val="1C2541"/>
+            <a:srgbClr val="182038"/>
           </a:solidFill>
           <a:ln w="25400">
             <a:solidFill>
@@ -3887,57 +3846,97 @@
           <a:p>
             <a:pPr algn="ctr">
               <a:spcAft>
-                <a:spcPts val="400"/>
+                <a:spcPts val="1000"/>
               </a:spcAft>
+              <a:defRPr sz="1250">
+                <a:solidFill>
+                  <a:srgbClr val="94A3B8"/>
+                </a:solidFill>
+                <a:latin typeface="標楷體"/>
+              </a:defRPr>
+            </a:pPr>
+            <a:r>
+              <a:t>📖 課文：「太陽伸出暖暖的手，拍拍小草說...水滴化成彩虹，大海也會閃閃發亮。」</a:t>
+            </a:r>
+          </a:p>
+          <a:p>
+            <a:pPr>
               <a:defRPr sz="1500" b="1">
                 <a:solidFill>
-                  <a:srgbClr val="FFB703"/>
-                </a:solidFill>
-                <a:latin typeface="微軟正黑體"/>
-              </a:defRPr>
-            </a:pPr>
-            <a:r>
-              <a:t>📜 課文金句（寫在直行本格子裡）：</a:t>
+                  <a:srgbClr val="38BDF8"/>
+                </a:solidFill>
+                <a:latin typeface="微軟正黑體"/>
+              </a:defRPr>
+            </a:pPr>
+            <a:r>
+              <a:t>① 角色與動作</a:t>
             </a:r>
           </a:p>
           <a:p>
             <a:pPr>
               <a:spcAft>
-                <a:spcPts val="1400"/>
+                <a:spcPts val="1000"/>
               </a:spcAft>
-              <a:defRPr sz="1400" b="1">
+              <a:defRPr sz="1400">
+                <a:solidFill>
+                  <a:srgbClr val="FFFFFF"/>
+                </a:solidFill>
+                <a:latin typeface="微軟正黑體"/>
+              </a:defRPr>
+            </a:pPr>
+            <a:r>
+              <a:t>• 角色：太陽、小草</a:t>
+            </a:r>
+            <a:br/>
+            <a:r>
+              <a:t>• 動作：太陽「伸出暖暖的手」、「拍拍小草」</a:t>
+            </a:r>
+          </a:p>
+          <a:p>
+            <a:pPr>
+              <a:defRPr sz="1500" b="1">
                 <a:solidFill>
                   <a:srgbClr val="FFB703"/>
                 </a:solidFill>
-                <a:latin typeface="標楷體"/>
-              </a:defRPr>
-            </a:pPr>
-            <a:r>
-              <a:t>「我是太陽，有一顆熱情的心。我讓水滴化成彩虹，大海也會閃閃發亮。」</a:t>
+                <a:latin typeface="微軟正黑體"/>
+              </a:defRPr>
+            </a:pPr>
+            <a:r>
+              <a:t>② 背景</a:t>
             </a:r>
           </a:p>
           <a:p>
             <a:pPr>
               <a:spcAft>
-                <a:spcPts val="600"/>
+                <a:spcPts val="1000"/>
               </a:spcAft>
+              <a:defRPr sz="1400">
+                <a:solidFill>
+                  <a:srgbClr val="FFFFFF"/>
+                </a:solidFill>
+                <a:latin typeface="微軟正黑體"/>
+              </a:defRPr>
+            </a:pPr>
+            <a:r>
+              <a:t>• 背景：泥土、彩虹、閃閃發亮的大海</a:t>
+            </a:r>
+          </a:p>
+          <a:p>
+            <a:pPr>
               <a:defRPr sz="1500" b="1">
                 <a:solidFill>
-                  <a:srgbClr val="38BDF8"/>
-                </a:solidFill>
-                <a:latin typeface="微軟正黑體"/>
-              </a:defRPr>
-            </a:pPr>
-            <a:r>
-              <a:t>🎨 畫畫小秘訣（幾何圖形拆解）：</a:t>
+                  <a:srgbClr val="34D399"/>
+                </a:solidFill>
+                <a:latin typeface="微軟正黑體"/>
+              </a:defRPr>
+            </a:pPr>
+            <a:r>
+              <a:t>③ 畫上去（簡單好畫）</a:t>
             </a:r>
           </a:p>
           <a:p>
             <a:pPr>
-              <a:spcAft>
-                <a:spcPts val="600"/>
-              </a:spcAft>
-              <a:defRPr sz="1300">
+              <a:defRPr sz="1400">
                 <a:solidFill>
                   <a:srgbClr val="FFFFFF"/>
                 </a:solidFill>
@@ -3945,55 +3944,11 @@
               </a:defRPr>
             </a:pPr>
             <a:r>
-              <a:t>1. 【畫太陽】：在上方畫一個大圓形，加上微笑與光芒。</a:t>
-            </a:r>
-          </a:p>
-          <a:p>
-            <a:pPr>
-              <a:spcAft>
-                <a:spcPts val="600"/>
-              </a:spcAft>
-              <a:defRPr sz="1300">
-                <a:solidFill>
-                  <a:srgbClr val="FFFFFF"/>
-                </a:solidFill>
-                <a:latin typeface="微軟正黑體"/>
-              </a:defRPr>
-            </a:pPr>
-            <a:r>
-              <a:t>2. 【畫暖手】：從太陽伸出兩隻長長的「波浪手」往下探。</a:t>
-            </a:r>
-          </a:p>
-          <a:p>
-            <a:pPr>
-              <a:spcAft>
-                <a:spcPts val="600"/>
-              </a:spcAft>
-              <a:defRPr sz="1300">
-                <a:solidFill>
-                  <a:srgbClr val="FFFFFF"/>
-                </a:solidFill>
-                <a:latin typeface="微軟正黑體"/>
-              </a:defRPr>
-            </a:pPr>
-            <a:r>
-              <a:t>3. 【畫小草】：下方畫一小撮泥土，長出兩片微笑綠葉。</a:t>
-            </a:r>
-          </a:p>
-          <a:p>
-            <a:pPr>
-              <a:spcAft>
-                <a:spcPts val="600"/>
-              </a:spcAft>
-              <a:defRPr sz="1300">
-                <a:solidFill>
-                  <a:srgbClr val="FFFFFF"/>
-                </a:solidFill>
-                <a:latin typeface="微軟正黑體"/>
-              </a:defRPr>
-            </a:pPr>
-            <a:r>
-              <a:t>4. 【添色彩】：遠處畫一道七彩彩虹和藍色波浪大海。</a:t>
+              <a:t>• 先畫：圓圓的太陽伸出兩隻大手，拍地上的小草。</a:t>
+            </a:r>
+            <a:br/>
+            <a:r>
+              <a:t>• 再補：後面畫一條彩虹和大波浪海水。</a:t>
             </a:r>
           </a:p>
         </p:txBody>
@@ -4092,7 +4047,7 @@
               </a:defRPr>
             </a:pPr>
             <a:r>
-              <a:t>【第二段創作示範】展現清脆動人的歌聲</a:t>
+              <a:t>【第 2 格】找角色 ➔ 找動作 ➔ 找背景 ➔ 畫上去</a:t>
             </a:r>
           </a:p>
         </p:txBody>
@@ -4128,7 +4083,7 @@
               </a:defRPr>
             </a:pPr>
             <a:r>
-              <a:t>🐦 第 2 格示範：唱歌的小雲雀與青山</a:t>
+              <a:t>🐦 第二段：小雲雀唱歌</a:t>
             </a:r>
           </a:p>
         </p:txBody>
@@ -4150,7 +4105,7 @@
         <p:spPr>
           <a:xfrm>
             <a:off x="731520" y="1280160"/>
-            <a:ext cx="5120640" cy="3823411"/>
+            <a:ext cx="4937760" cy="3686861"/>
           </a:xfrm>
           <a:prstGeom prst="rect">
             <a:avLst/>
@@ -4165,14 +4120,14 @@
         </p:nvSpPr>
         <p:spPr>
           <a:xfrm>
-            <a:off x="6126480" y="1280160"/>
-            <a:ext cx="5303520" cy="5029200"/>
+            <a:off x="5943600" y="1280160"/>
+            <a:ext cx="5486400" cy="5029200"/>
           </a:xfrm>
           <a:prstGeom prst="roundRect">
             <a:avLst/>
           </a:prstGeom>
           <a:solidFill>
-            <a:srgbClr val="1C2541"/>
+            <a:srgbClr val="182038"/>
           </a:solidFill>
           <a:ln w="25400">
             <a:solidFill>
@@ -4200,8 +4155,21 @@
           <a:p>
             <a:pPr algn="ctr">
               <a:spcAft>
-                <a:spcPts val="400"/>
+                <a:spcPts val="1000"/>
               </a:spcAft>
+              <a:defRPr sz="1250">
+                <a:solidFill>
+                  <a:srgbClr val="94A3B8"/>
+                </a:solidFill>
+                <a:latin typeface="標楷體"/>
+              </a:defRPr>
+            </a:pPr>
+            <a:r>
+              <a:t>📖 課文：「小雲雀輕快的飛向青山...沒有多彩的羽衣，卻有清脆的歌聲...」</a:t>
+            </a:r>
+          </a:p>
+          <a:p>
+            <a:pPr>
               <a:defRPr sz="1500" b="1">
                 <a:solidFill>
                   <a:srgbClr val="38BDF8"/>
@@ -4210,47 +4178,74 @@
               </a:defRPr>
             </a:pPr>
             <a:r>
-              <a:t>📜 課文金句（寫在直行本格子裡）：</a:t>
+              <a:t>① 角色與動作</a:t>
             </a:r>
           </a:p>
           <a:p>
             <a:pPr>
               <a:spcAft>
-                <a:spcPts val="1400"/>
+                <a:spcPts val="1000"/>
               </a:spcAft>
-              <a:defRPr sz="1400" b="1">
+              <a:defRPr sz="1400">
+                <a:solidFill>
+                  <a:srgbClr val="FFFFFF"/>
+                </a:solidFill>
+                <a:latin typeface="微軟正黑體"/>
+              </a:defRPr>
+            </a:pPr>
+            <a:r>
+              <a:t>• 角色：小雲雀</a:t>
+            </a:r>
+            <a:br/>
+            <a:r>
+              <a:t>• 動作：「一邊唱歌」、「停留半空中」</a:t>
+            </a:r>
+          </a:p>
+          <a:p>
+            <a:pPr>
+              <a:defRPr sz="1500" b="1">
                 <a:solidFill>
                   <a:srgbClr val="FFB703"/>
                 </a:solidFill>
-                <a:latin typeface="標楷體"/>
-              </a:defRPr>
-            </a:pPr>
-            <a:r>
-              <a:t>「我是小雲雀，沒有多彩的羽衣，卻有清脆的歌聲。我喜歡一邊唱歌，一邊停留半空中。」</a:t>
+                <a:latin typeface="微軟正黑體"/>
+              </a:defRPr>
+            </a:pPr>
+            <a:r>
+              <a:t>② 背景</a:t>
             </a:r>
           </a:p>
           <a:p>
             <a:pPr>
               <a:spcAft>
-                <a:spcPts val="600"/>
+                <a:spcPts val="1000"/>
               </a:spcAft>
+              <a:defRPr sz="1400">
+                <a:solidFill>
+                  <a:srgbClr val="FFFFFF"/>
+                </a:solidFill>
+                <a:latin typeface="微軟正黑體"/>
+              </a:defRPr>
+            </a:pPr>
+            <a:r>
+              <a:t>• 背景：青山、藍天（加上音符 🎵 🎶）</a:t>
+            </a:r>
+          </a:p>
+          <a:p>
+            <a:pPr>
               <a:defRPr sz="1500" b="1">
                 <a:solidFill>
-                  <a:srgbClr val="38BDF8"/>
-                </a:solidFill>
-                <a:latin typeface="微軟正黑體"/>
-              </a:defRPr>
-            </a:pPr>
-            <a:r>
-              <a:t>🎨 畫畫小秘訣（幾何圖形拆解）：</a:t>
+                  <a:srgbClr val="34D399"/>
+                </a:solidFill>
+                <a:latin typeface="微軟正黑體"/>
+              </a:defRPr>
+            </a:pPr>
+            <a:r>
+              <a:t>③ 畫上去（簡單好畫）</a:t>
             </a:r>
           </a:p>
           <a:p>
             <a:pPr>
-              <a:spcAft>
-                <a:spcPts val="600"/>
-              </a:spcAft>
-              <a:defRPr sz="1300">
+              <a:defRPr sz="1400">
                 <a:solidFill>
                   <a:srgbClr val="FFFFFF"/>
                 </a:solidFill>
@@ -4258,55 +4253,11 @@
               </a:defRPr>
             </a:pPr>
             <a:r>
-              <a:t>1. 【畫雲雀】：在中間畫橢圓身體，畫上張開的翅膀與小尖嘴。</a:t>
-            </a:r>
-          </a:p>
-          <a:p>
-            <a:pPr>
-              <a:spcAft>
-                <a:spcPts val="600"/>
-              </a:spcAft>
-              <a:defRPr sz="1300">
-                <a:solidFill>
-                  <a:srgbClr val="FFFFFF"/>
-                </a:solidFill>
-                <a:latin typeface="微軟正黑體"/>
-              </a:defRPr>
-            </a:pPr>
-            <a:r>
-              <a:t>2. 【畫音符】：在小鳥嘴巴前畫上 🎵 🎶 跳動的音符。</a:t>
-            </a:r>
-          </a:p>
-          <a:p>
-            <a:pPr>
-              <a:spcAft>
-                <a:spcPts val="600"/>
-              </a:spcAft>
-              <a:defRPr sz="1300">
-                <a:solidFill>
-                  <a:srgbClr val="FFFFFF"/>
-                </a:solidFill>
-                <a:latin typeface="微軟正黑體"/>
-              </a:defRPr>
-            </a:pPr>
-            <a:r>
-              <a:t>3. 【畫青山】：背景用波浪起伏線條畫出連綿綠色大山。</a:t>
-            </a:r>
-          </a:p>
-          <a:p>
-            <a:pPr>
-              <a:spcAft>
-                <a:spcPts val="600"/>
-              </a:spcAft>
-              <a:defRPr sz="1300">
-                <a:solidFill>
-                  <a:srgbClr val="FFFFFF"/>
-                </a:solidFill>
-                <a:latin typeface="微軟正黑體"/>
-              </a:defRPr>
-            </a:pPr>
-            <a:r>
-              <a:t>4. 【加細節】：畫上純樸的咖啡色羽毛，停在藍天半空中。</a:t>
+              <a:t>• 先畫：半空中畫一隻小鳥張開嘴巴唱歌，旁邊畫音符。</a:t>
+            </a:r>
+            <a:br/>
+            <a:r>
+              <a:t>• 再補：背景畫連綿起伏的大山。</a:t>
             </a:r>
           </a:p>
         </p:txBody>
@@ -4405,7 +4356,7 @@
               </a:defRPr>
             </a:pPr>
             <a:r>
-              <a:t>【第三段創作示範】溫柔陪伴與四處旅行</a:t>
+              <a:t>【第 3 格】找角色 ➔ 找動作 ➔ 找背景 ➔ 畫上去</a:t>
             </a:r>
           </a:p>
         </p:txBody>
@@ -4441,7 +4392,7 @@
               </a:defRPr>
             </a:pPr>
             <a:r>
-              <a:t>🌬️ 第 3 格示範：旅行的風與金黃落葉</a:t>
+              <a:t>🌬️ 第三段：旅行的風</a:t>
             </a:r>
           </a:p>
         </p:txBody>
@@ -4463,7 +4414,7 @@
         <p:spPr>
           <a:xfrm>
             <a:off x="731520" y="1280160"/>
-            <a:ext cx="5120640" cy="3823411"/>
+            <a:ext cx="4937760" cy="3686861"/>
           </a:xfrm>
           <a:prstGeom prst="rect">
             <a:avLst/>
@@ -4478,14 +4429,14 @@
         </p:nvSpPr>
         <p:spPr>
           <a:xfrm>
-            <a:off x="6126480" y="1280160"/>
-            <a:ext cx="5303520" cy="5029200"/>
+            <a:off x="5943600" y="1280160"/>
+            <a:ext cx="5486400" cy="5029200"/>
           </a:xfrm>
           <a:prstGeom prst="roundRect">
             <a:avLst/>
           </a:prstGeom>
           <a:solidFill>
-            <a:srgbClr val="1C2541"/>
+            <a:srgbClr val="182038"/>
           </a:solidFill>
           <a:ln w="25400">
             <a:solidFill>
@@ -4513,57 +4464,97 @@
           <a:p>
             <a:pPr algn="ctr">
               <a:spcAft>
-                <a:spcPts val="400"/>
+                <a:spcPts val="1000"/>
               </a:spcAft>
+              <a:defRPr sz="1250">
+                <a:solidFill>
+                  <a:srgbClr val="94A3B8"/>
+                </a:solidFill>
+                <a:latin typeface="標楷體"/>
+              </a:defRPr>
+            </a:pPr>
+            <a:r>
+              <a:t>📖 課文：「風聽見樹葉慢慢落下，用長長的頭髮接住...聞百合的花香，看成群的綿羊...」</a:t>
+            </a:r>
+          </a:p>
+          <a:p>
+            <a:pPr>
               <a:defRPr sz="1500" b="1">
                 <a:solidFill>
-                  <a:srgbClr val="F43F5E"/>
-                </a:solidFill>
-                <a:latin typeface="微軟正黑體"/>
-              </a:defRPr>
-            </a:pPr>
-            <a:r>
-              <a:t>📜 課文金句（寫在直行本格子裡）：</a:t>
+                  <a:srgbClr val="38BDF8"/>
+                </a:solidFill>
+                <a:latin typeface="微軟正黑體"/>
+              </a:defRPr>
+            </a:pPr>
+            <a:r>
+              <a:t>① 角色與動作</a:t>
             </a:r>
           </a:p>
           <a:p>
             <a:pPr>
               <a:spcAft>
-                <a:spcPts val="1400"/>
+                <a:spcPts val="1000"/>
               </a:spcAft>
-              <a:defRPr sz="1400" b="1">
+              <a:defRPr sz="1400">
+                <a:solidFill>
+                  <a:srgbClr val="FFFFFF"/>
+                </a:solidFill>
+                <a:latin typeface="微軟正黑體"/>
+              </a:defRPr>
+            </a:pPr>
+            <a:r>
+              <a:t>• 角色：風、落葉</a:t>
+            </a:r>
+            <a:br/>
+            <a:r>
+              <a:t>• 動作：用「長長的頭髮接住」落葉、「送回地面」</a:t>
+            </a:r>
+          </a:p>
+          <a:p>
+            <a:pPr>
+              <a:defRPr sz="1500" b="1">
                 <a:solidFill>
                   <a:srgbClr val="FFB703"/>
                 </a:solidFill>
-                <a:latin typeface="標楷體"/>
-              </a:defRPr>
-            </a:pPr>
-            <a:r>
-              <a:t>「我是風，最喜歡四處旅行。帶你去聞百合的花香，帶你去看成群的綿羊，再送你平安回地面的家。」</a:t>
+                <a:latin typeface="微軟正黑體"/>
+              </a:defRPr>
+            </a:pPr>
+            <a:r>
+              <a:t>② 背景</a:t>
             </a:r>
           </a:p>
           <a:p>
             <a:pPr>
               <a:spcAft>
-                <a:spcPts val="600"/>
+                <a:spcPts val="1000"/>
               </a:spcAft>
+              <a:defRPr sz="1400">
+                <a:solidFill>
+                  <a:srgbClr val="FFFFFF"/>
+                </a:solidFill>
+                <a:latin typeface="微軟正黑體"/>
+              </a:defRPr>
+            </a:pPr>
+            <a:r>
+              <a:t>• 背景：百合花香、成群的綿羊</a:t>
+            </a:r>
+          </a:p>
+          <a:p>
+            <a:pPr>
               <a:defRPr sz="1500" b="1">
                 <a:solidFill>
-                  <a:srgbClr val="38BDF8"/>
-                </a:solidFill>
-                <a:latin typeface="微軟正黑體"/>
-              </a:defRPr>
-            </a:pPr>
-            <a:r>
-              <a:t>🎨 畫畫小秘訣（幾何圖形拆解）：</a:t>
+                  <a:srgbClr val="34D399"/>
+                </a:solidFill>
+                <a:latin typeface="微軟正黑體"/>
+              </a:defRPr>
+            </a:pPr>
+            <a:r>
+              <a:t>③ 畫上去（簡單好畫）</a:t>
             </a:r>
           </a:p>
           <a:p>
             <a:pPr>
-              <a:spcAft>
-                <a:spcPts val="600"/>
-              </a:spcAft>
-              <a:defRPr sz="1300">
+              <a:defRPr sz="1400">
                 <a:solidFill>
                   <a:srgbClr val="FFFFFF"/>
                 </a:solidFill>
@@ -4571,55 +4562,11 @@
               </a:defRPr>
             </a:pPr>
             <a:r>
-              <a:t>1. 【畫風精靈】：畫一個微笑臉龐，長髮像白雲波浪一樣飄逸。</a:t>
-            </a:r>
-          </a:p>
-          <a:p>
-            <a:pPr>
-              <a:spcAft>
-                <a:spcPts val="600"/>
-              </a:spcAft>
-              <a:defRPr sz="1300">
-                <a:solidFill>
-                  <a:srgbClr val="FFFFFF"/>
-                </a:solidFill>
-                <a:latin typeface="微軟正黑體"/>
-              </a:defRPr>
-            </a:pPr>
-            <a:r>
-              <a:t>2. 【畫落葉】：風的雙手輕輕捧著一片金色旋轉的落葉。</a:t>
-            </a:r>
-          </a:p>
-          <a:p>
-            <a:pPr>
-              <a:spcAft>
-                <a:spcPts val="600"/>
-              </a:spcAft>
-              <a:defRPr sz="1300">
-                <a:solidFill>
-                  <a:srgbClr val="FFFFFF"/>
-                </a:solidFill>
-                <a:latin typeface="微軟正黑體"/>
-              </a:defRPr>
-            </a:pPr>
-            <a:r>
-              <a:t>3. 【畫花與羊】：下方草地畫幾朵白百合，遠處畫幾隻白綿羊。</a:t>
-            </a:r>
-          </a:p>
-          <a:p>
-            <a:pPr>
-              <a:spcAft>
-                <a:spcPts val="600"/>
-              </a:spcAft>
-              <a:defRPr sz="1300">
-                <a:solidFill>
-                  <a:srgbClr val="FFFFFF"/>
-                </a:solidFill>
-                <a:latin typeface="微軟正黑體"/>
-              </a:defRPr>
-            </a:pPr>
-            <a:r>
-              <a:t>4. 【塗顏色】：用淡藍色、淺黃色營造微風輕拂的夢幻感。</a:t>
+              <a:t>• 先畫：像雲一樣飄逸的長髮，雙手接住一片金黃落葉。</a:t>
+            </a:r>
+            <a:br/>
+            <a:r>
+              <a:t>• 再補：地面畫幾朵白花、遠處畫幾隻小綿羊。</a:t>
             </a:r>
           </a:p>
         </p:txBody>
@@ -4718,7 +4665,7 @@
               </a:defRPr>
             </a:pPr>
             <a:r>
-              <a:t>【第四段創作示範】開朗自我介紹與快樂時光</a:t>
+              <a:t>【第 4 格】找角色 ➔ 找動作 ➔ 找背景 ➔ 畫上去</a:t>
             </a:r>
           </a:p>
         </p:txBody>
@@ -4754,7 +4701,7 @@
               </a:defRPr>
             </a:pPr>
             <a:r>
-              <a:t>👦 第 4 格示範：開朗的小豆子與足球</a:t>
+              <a:t>👦 第四段：小豆子踢球</a:t>
             </a:r>
           </a:p>
         </p:txBody>
@@ -4776,7 +4723,7 @@
         <p:spPr>
           <a:xfrm>
             <a:off x="731520" y="1280160"/>
-            <a:ext cx="5120640" cy="3823411"/>
+            <a:ext cx="4937760" cy="3686861"/>
           </a:xfrm>
           <a:prstGeom prst="rect">
             <a:avLst/>
@@ -4791,14 +4738,14 @@
         </p:nvSpPr>
         <p:spPr>
           <a:xfrm>
-            <a:off x="6126480" y="1280160"/>
-            <a:ext cx="5303520" cy="5029200"/>
+            <a:off x="5943600" y="1280160"/>
+            <a:ext cx="5486400" cy="5029200"/>
           </a:xfrm>
           <a:prstGeom prst="roundRect">
             <a:avLst/>
           </a:prstGeom>
           <a:solidFill>
-            <a:srgbClr val="1C2541"/>
+            <a:srgbClr val="182038"/>
           </a:solidFill>
           <a:ln w="25400">
             <a:solidFill>
@@ -4826,57 +4773,97 @@
           <a:p>
             <a:pPr algn="ctr">
               <a:spcAft>
-                <a:spcPts val="400"/>
+                <a:spcPts val="1000"/>
               </a:spcAft>
+              <a:defRPr sz="1250">
+                <a:solidFill>
+                  <a:srgbClr val="94A3B8"/>
+                </a:solidFill>
+                <a:latin typeface="標楷體"/>
+              </a:defRPr>
+            </a:pPr>
+            <a:r>
+              <a:t>📖 課文：「我是開朗的小豆子，最會踢足球。人和球一起飛奔，是最快樂的時光。」</a:t>
+            </a:r>
+          </a:p>
+          <a:p>
+            <a:pPr>
               <a:defRPr sz="1500" b="1">
                 <a:solidFill>
-                  <a:srgbClr val="34D399"/>
-                </a:solidFill>
-                <a:latin typeface="微軟正黑體"/>
-              </a:defRPr>
-            </a:pPr>
-            <a:r>
-              <a:t>📜 課文金句（寫在直行本格子裡）：</a:t>
+                  <a:srgbClr val="38BDF8"/>
+                </a:solidFill>
+                <a:latin typeface="微軟正黑體"/>
+              </a:defRPr>
+            </a:pPr>
+            <a:r>
+              <a:t>① 角色與動作</a:t>
             </a:r>
           </a:p>
           <a:p>
             <a:pPr>
               <a:spcAft>
-                <a:spcPts val="1400"/>
+                <a:spcPts val="1000"/>
               </a:spcAft>
-              <a:defRPr sz="1400" b="1">
+              <a:defRPr sz="1400">
+                <a:solidFill>
+                  <a:srgbClr val="FFFFFF"/>
+                </a:solidFill>
+                <a:latin typeface="微軟正黑體"/>
+              </a:defRPr>
+            </a:pPr>
+            <a:r>
+              <a:t>• 角色：開朗的小豆子（或畫你自己！）</a:t>
+            </a:r>
+            <a:br/>
+            <a:r>
+              <a:t>• 動作：「踢足球」、「人和球一起飛奔」</a:t>
+            </a:r>
+          </a:p>
+          <a:p>
+            <a:pPr>
+              <a:defRPr sz="1500" b="1">
                 <a:solidFill>
                   <a:srgbClr val="FFB703"/>
                 </a:solidFill>
-                <a:latin typeface="標楷體"/>
-              </a:defRPr>
-            </a:pPr>
-            <a:r>
-              <a:t>「我是開朗的小豆子，最會踢足球。人和球一起飛奔，是最快樂的時光。」</a:t>
+                <a:latin typeface="微軟正黑體"/>
+              </a:defRPr>
+            </a:pPr>
+            <a:r>
+              <a:t>② 背景</a:t>
             </a:r>
           </a:p>
           <a:p>
             <a:pPr>
               <a:spcAft>
-                <a:spcPts val="600"/>
+                <a:spcPts val="1000"/>
               </a:spcAft>
+              <a:defRPr sz="1400">
+                <a:solidFill>
+                  <a:srgbClr val="FFFFFF"/>
+                </a:solidFill>
+                <a:latin typeface="微軟正黑體"/>
+              </a:defRPr>
+            </a:pPr>
+            <a:r>
+              <a:t>• 背景：教室、操場、新同學</a:t>
+            </a:r>
+          </a:p>
+          <a:p>
+            <a:pPr>
               <a:defRPr sz="1500" b="1">
                 <a:solidFill>
-                  <a:srgbClr val="38BDF8"/>
-                </a:solidFill>
-                <a:latin typeface="微軟正黑體"/>
-              </a:defRPr>
-            </a:pPr>
-            <a:r>
-              <a:t>🎨 畫畫小秘訣（幾何圖形拆解）：</a:t>
+                  <a:srgbClr val="34D399"/>
+                </a:solidFill>
+                <a:latin typeface="微軟正黑體"/>
+              </a:defRPr>
+            </a:pPr>
+            <a:r>
+              <a:t>③ 畫上去（簡單好畫）</a:t>
             </a:r>
           </a:p>
           <a:p>
             <a:pPr>
-              <a:spcAft>
-                <a:spcPts val="600"/>
-              </a:spcAft>
-              <a:defRPr sz="1300">
+              <a:defRPr sz="1400">
                 <a:solidFill>
                   <a:srgbClr val="FFFFFF"/>
                 </a:solidFill>
@@ -4884,55 +4871,11 @@
               </a:defRPr>
             </a:pPr>
             <a:r>
-              <a:t>1. 【畫主角】：畫一個大笑奔跑的小男孩（或是你自己！）。</a:t>
-            </a:r>
-          </a:p>
-          <a:p>
-            <a:pPr>
-              <a:spcAft>
-                <a:spcPts val="600"/>
-              </a:spcAft>
-              <a:defRPr sz="1300">
-                <a:solidFill>
-                  <a:srgbClr val="FFFFFF"/>
-                </a:solidFill>
-                <a:latin typeface="微軟正黑體"/>
-              </a:defRPr>
-            </a:pPr>
-            <a:r>
-              <a:t>2. 【畫足球】：腳邊畫一個黑白格子的圓形足球與運動線條。</a:t>
-            </a:r>
-          </a:p>
-          <a:p>
-            <a:pPr>
-              <a:spcAft>
-                <a:spcPts val="600"/>
-              </a:spcAft>
-              <a:defRPr sz="1300">
-                <a:solidFill>
-                  <a:srgbClr val="FFFFFF"/>
-                </a:solidFill>
-                <a:latin typeface="微軟正黑體"/>
-              </a:defRPr>
-            </a:pPr>
-            <a:r>
-              <a:t>3. 【畫背景】：畫出學校教室與操場上揮手歡呼的新同學。</a:t>
-            </a:r>
-          </a:p>
-          <a:p>
-            <a:pPr>
-              <a:spcAft>
-                <a:spcPts val="600"/>
-              </a:spcAft>
-              <a:defRPr sz="1300">
-                <a:solidFill>
-                  <a:srgbClr val="FFFFFF"/>
-                </a:solidFill>
-                <a:latin typeface="微軟正黑體"/>
-              </a:defRPr>
-            </a:pPr>
-            <a:r>
-              <a:t>4. 【寫文字】：工整寫下自我介紹金句，完成四格作品！</a:t>
+              <a:t>• 先畫：一個大笑的小朋友，正在大步跑著踢足球。</a:t>
+            </a:r>
+            <a:br/>
+            <a:r>
+              <a:t>• 再補：身後畫學校校舍或揮手歡呼的新同學。</a:t>
             </a:r>
           </a:p>
         </p:txBody>
@@ -5031,7 +4974,7 @@
               </a:defRPr>
             </a:pPr>
             <a:r>
-              <a:t>【分享發表】互相欣賞四格筆記，成為最好的新朋友！</a:t>
+              <a:t>【快速檢查】直行本四格是否都畫對了？</a:t>
             </a:r>
           </a:p>
         </p:txBody>
@@ -5067,7 +5010,7 @@
               </a:defRPr>
             </a:pPr>
             <a:r>
-              <a:t>🌟 成果大展演：看圖朗讀與新朋友分享</a:t>
+              <a:t>📋 第一課四格「角色・動作・背景」總對照</a:t>
             </a:r>
           </a:p>
         </p:txBody>
@@ -5081,13 +5024,13 @@
         <p:spPr>
           <a:xfrm>
             <a:off x="731520" y="1371600"/>
-            <a:ext cx="5120640" cy="2194560"/>
+            <a:ext cx="5166360" cy="2240280"/>
           </a:xfrm>
           <a:prstGeom prst="roundRect">
             <a:avLst/>
           </a:prstGeom>
           <a:solidFill>
-            <a:srgbClr val="1C2541"/>
+            <a:srgbClr val="182038"/>
           </a:solidFill>
           <a:ln w="25400">
             <a:solidFill>
@@ -5115,9 +5058,9 @@
           <a:p>
             <a:pPr algn="ctr">
               <a:spcAft>
-                <a:spcPts val="600"/>
+                <a:spcPts val="400"/>
               </a:spcAft>
-              <a:defRPr sz="1800" b="1">
+              <a:defRPr sz="1700" b="1">
                 <a:solidFill>
                   <a:srgbClr val="FFB703"/>
                 </a:solidFill>
@@ -5125,36 +5068,46 @@
               </a:defRPr>
             </a:pPr>
             <a:r>
-              <a:t>第 1 格：太陽 ☀️</a:t>
+              <a:t>第 1 格</a:t>
             </a:r>
           </a:p>
           <a:p>
             <a:pPr>
-              <a:spcAft>
-                <a:spcPts val="800"/>
-              </a:spcAft>
-              <a:defRPr sz="1400">
+              <a:defRPr sz="1350" b="1">
                 <a:solidFill>
                   <a:srgbClr val="FFFFFF"/>
                 </a:solidFill>
-                <a:latin typeface="標楷體"/>
-              </a:defRPr>
-            </a:pPr>
-            <a:r>
-              <a:t>我是太陽，有一顆熱情的心...</a:t>
+                <a:latin typeface="微軟正黑體"/>
+              </a:defRPr>
+            </a:pPr>
+            <a:r>
+              <a:t>👤 角色：太陽、小草</a:t>
             </a:r>
           </a:p>
           <a:p>
             <a:pPr>
-              <a:defRPr sz="1200">
-                <a:solidFill>
-                  <a:srgbClr val="94A3B8"/>
-                </a:solidFill>
-                <a:latin typeface="微軟正黑體"/>
-              </a:defRPr>
-            </a:pPr>
-            <a:r>
-              <a:t>🎯 發表挑戰：看著自己的圖，不用看課本，流利說出這一段！</a:t>
+              <a:defRPr sz="1350">
+                <a:solidFill>
+                  <a:srgbClr val="38BDF8"/>
+                </a:solidFill>
+                <a:latin typeface="微軟正黑體"/>
+              </a:defRPr>
+            </a:pPr>
+            <a:r>
+              <a:t>🏃 動作：伸出手、拍拍小草</a:t>
+            </a:r>
+          </a:p>
+          <a:p>
+            <a:pPr>
+              <a:defRPr sz="1350">
+                <a:solidFill>
+                  <a:srgbClr val="FFB703"/>
+                </a:solidFill>
+                <a:latin typeface="微軟正黑體"/>
+              </a:defRPr>
+            </a:pPr>
+            <a:r>
+              <a:t>🏞️ 背景：泥土、彩虹、大海</a:t>
             </a:r>
           </a:p>
         </p:txBody>
@@ -5167,14 +5120,14 @@
         </p:nvSpPr>
         <p:spPr>
           <a:xfrm>
-            <a:off x="6126480" y="1371600"/>
-            <a:ext cx="5120640" cy="2194560"/>
+            <a:off x="6172200" y="1371600"/>
+            <a:ext cx="5166360" cy="2240280"/>
           </a:xfrm>
           <a:prstGeom prst="roundRect">
             <a:avLst/>
           </a:prstGeom>
           <a:solidFill>
-            <a:srgbClr val="1C2541"/>
+            <a:srgbClr val="182038"/>
           </a:solidFill>
           <a:ln w="25400">
             <a:solidFill>
@@ -5202,9 +5155,48 @@
           <a:p>
             <a:pPr algn="ctr">
               <a:spcAft>
-                <a:spcPts val="600"/>
+                <a:spcPts val="400"/>
               </a:spcAft>
-              <a:defRPr sz="1800" b="1">
+              <a:defRPr sz="1700" b="1">
+                <a:solidFill>
+                  <a:srgbClr val="38BDF8"/>
+                </a:solidFill>
+                <a:latin typeface="微軟正黑體"/>
+              </a:defRPr>
+            </a:pPr>
+            <a:r>
+              <a:t>第 2 格</a:t>
+            </a:r>
+          </a:p>
+          <a:p>
+            <a:pPr>
+              <a:defRPr sz="1350" b="1">
+                <a:solidFill>
+                  <a:srgbClr val="FFFFFF"/>
+                </a:solidFill>
+                <a:latin typeface="微軟正黑體"/>
+              </a:defRPr>
+            </a:pPr>
+            <a:r>
+              <a:t>👤 角色：小雲雀</a:t>
+            </a:r>
+          </a:p>
+          <a:p>
+            <a:pPr>
+              <a:defRPr sz="1350">
+                <a:solidFill>
+                  <a:srgbClr val="38BDF8"/>
+                </a:solidFill>
+                <a:latin typeface="微軟正黑體"/>
+              </a:defRPr>
+            </a:pPr>
+            <a:r>
+              <a:t>🏃 動作：半空中唱歌</a:t>
+            </a:r>
+          </a:p>
+          <a:p>
+            <a:pPr>
+              <a:defRPr sz="1350">
                 <a:solidFill>
                   <a:srgbClr val="FFB703"/>
                 </a:solidFill>
@@ -5212,36 +5204,7 @@
               </a:defRPr>
             </a:pPr>
             <a:r>
-              <a:t>第 2 格：雲雀 🐦</a:t>
-            </a:r>
-          </a:p>
-          <a:p>
-            <a:pPr>
-              <a:spcAft>
-                <a:spcPts val="800"/>
-              </a:spcAft>
-              <a:defRPr sz="1400">
-                <a:solidFill>
-                  <a:srgbClr val="FFFFFF"/>
-                </a:solidFill>
-                <a:latin typeface="標楷體"/>
-              </a:defRPr>
-            </a:pPr>
-            <a:r>
-              <a:t>我是小雲雀，沒有多彩的羽衣...</a:t>
-            </a:r>
-          </a:p>
-          <a:p>
-            <a:pPr>
-              <a:defRPr sz="1200">
-                <a:solidFill>
-                  <a:srgbClr val="94A3B8"/>
-                </a:solidFill>
-                <a:latin typeface="微軟正黑體"/>
-              </a:defRPr>
-            </a:pPr>
-            <a:r>
-              <a:t>🎯 發表挑戰：看著自己的圖，不用看課本，流利說出這一段！</a:t>
+              <a:t>🏞️ 背景：青山、跳動音符</a:t>
             </a:r>
           </a:p>
         </p:txBody>
@@ -5255,13 +5218,13 @@
         <p:spPr>
           <a:xfrm>
             <a:off x="731520" y="3840480"/>
-            <a:ext cx="5120640" cy="2194560"/>
+            <a:ext cx="5166360" cy="2240280"/>
           </a:xfrm>
           <a:prstGeom prst="roundRect">
             <a:avLst/>
           </a:prstGeom>
           <a:solidFill>
-            <a:srgbClr val="1C2541"/>
+            <a:srgbClr val="182038"/>
           </a:solidFill>
           <a:ln w="25400">
             <a:solidFill>
@@ -5289,9 +5252,48 @@
           <a:p>
             <a:pPr algn="ctr">
               <a:spcAft>
-                <a:spcPts val="600"/>
+                <a:spcPts val="400"/>
               </a:spcAft>
-              <a:defRPr sz="1800" b="1">
+              <a:defRPr sz="1700" b="1">
+                <a:solidFill>
+                  <a:srgbClr val="F43F5E"/>
+                </a:solidFill>
+                <a:latin typeface="微軟正黑體"/>
+              </a:defRPr>
+            </a:pPr>
+            <a:r>
+              <a:t>第 3 格</a:t>
+            </a:r>
+          </a:p>
+          <a:p>
+            <a:pPr>
+              <a:defRPr sz="1350" b="1">
+                <a:solidFill>
+                  <a:srgbClr val="FFFFFF"/>
+                </a:solidFill>
+                <a:latin typeface="微軟正黑體"/>
+              </a:defRPr>
+            </a:pPr>
+            <a:r>
+              <a:t>👤 角色：風、落葉</a:t>
+            </a:r>
+          </a:p>
+          <a:p>
+            <a:pPr>
+              <a:defRPr sz="1350">
+                <a:solidFill>
+                  <a:srgbClr val="38BDF8"/>
+                </a:solidFill>
+                <a:latin typeface="微軟正黑體"/>
+              </a:defRPr>
+            </a:pPr>
+            <a:r>
+              <a:t>🏃 動作：長髮接住落葉</a:t>
+            </a:r>
+          </a:p>
+          <a:p>
+            <a:pPr>
+              <a:defRPr sz="1350">
                 <a:solidFill>
                   <a:srgbClr val="FFB703"/>
                 </a:solidFill>
@@ -5299,36 +5301,7 @@
               </a:defRPr>
             </a:pPr>
             <a:r>
-              <a:t>第 3 格：微風 🌬️</a:t>
-            </a:r>
-          </a:p>
-          <a:p>
-            <a:pPr>
-              <a:spcAft>
-                <a:spcPts val="800"/>
-              </a:spcAft>
-              <a:defRPr sz="1400">
-                <a:solidFill>
-                  <a:srgbClr val="FFFFFF"/>
-                </a:solidFill>
-                <a:latin typeface="標楷體"/>
-              </a:defRPr>
-            </a:pPr>
-            <a:r>
-              <a:t>我是風，最喜歡四處旅行...</a:t>
-            </a:r>
-          </a:p>
-          <a:p>
-            <a:pPr>
-              <a:defRPr sz="1200">
-                <a:solidFill>
-                  <a:srgbClr val="94A3B8"/>
-                </a:solidFill>
-                <a:latin typeface="微軟正黑體"/>
-              </a:defRPr>
-            </a:pPr>
-            <a:r>
-              <a:t>🎯 發表挑戰：看著自己的圖，不用看課本，流利說出這一段！</a:t>
+              <a:t>🏞️ 背景：百合花、成群綿羊</a:t>
             </a:r>
           </a:p>
         </p:txBody>
@@ -5341,14 +5314,14 @@
         </p:nvSpPr>
         <p:spPr>
           <a:xfrm>
-            <a:off x="6126480" y="3840480"/>
-            <a:ext cx="5120640" cy="2194560"/>
+            <a:off x="6172200" y="3840480"/>
+            <a:ext cx="5166360" cy="2240280"/>
           </a:xfrm>
           <a:prstGeom prst="roundRect">
             <a:avLst/>
           </a:prstGeom>
           <a:solidFill>
-            <a:srgbClr val="1C2541"/>
+            <a:srgbClr val="182038"/>
           </a:solidFill>
           <a:ln w="25400">
             <a:solidFill>
@@ -5376,9 +5349,48 @@
           <a:p>
             <a:pPr algn="ctr">
               <a:spcAft>
-                <a:spcPts val="600"/>
+                <a:spcPts val="400"/>
               </a:spcAft>
-              <a:defRPr sz="1800" b="1">
+              <a:defRPr sz="1700" b="1">
+                <a:solidFill>
+                  <a:srgbClr val="34D399"/>
+                </a:solidFill>
+                <a:latin typeface="微軟正黑體"/>
+              </a:defRPr>
+            </a:pPr>
+            <a:r>
+              <a:t>第 4 格</a:t>
+            </a:r>
+          </a:p>
+          <a:p>
+            <a:pPr>
+              <a:defRPr sz="1350" b="1">
+                <a:solidFill>
+                  <a:srgbClr val="FFFFFF"/>
+                </a:solidFill>
+                <a:latin typeface="微軟正黑體"/>
+              </a:defRPr>
+            </a:pPr>
+            <a:r>
+              <a:t>👤 角色：小豆子（自己）</a:t>
+            </a:r>
+          </a:p>
+          <a:p>
+            <a:pPr>
+              <a:defRPr sz="1350">
+                <a:solidFill>
+                  <a:srgbClr val="38BDF8"/>
+                </a:solidFill>
+                <a:latin typeface="微軟正黑體"/>
+              </a:defRPr>
+            </a:pPr>
+            <a:r>
+              <a:t>🏃 動作：踢足球、奔跑</a:t>
+            </a:r>
+          </a:p>
+          <a:p>
+            <a:pPr>
+              <a:defRPr sz="1350">
                 <a:solidFill>
                   <a:srgbClr val="FFB703"/>
                 </a:solidFill>
@@ -5386,36 +5398,7 @@
               </a:defRPr>
             </a:pPr>
             <a:r>
-              <a:t>第 4 格：小豆子 👦</a:t>
-            </a:r>
-          </a:p>
-          <a:p>
-            <a:pPr>
-              <a:spcAft>
-                <a:spcPts val="800"/>
-              </a:spcAft>
-              <a:defRPr sz="1400">
-                <a:solidFill>
-                  <a:srgbClr val="FFFFFF"/>
-                </a:solidFill>
-                <a:latin typeface="標楷體"/>
-              </a:defRPr>
-            </a:pPr>
-            <a:r>
-              <a:t>我是開朗的小豆子，最會踢足球...</a:t>
-            </a:r>
-          </a:p>
-          <a:p>
-            <a:pPr>
-              <a:defRPr sz="1200">
-                <a:solidFill>
-                  <a:srgbClr val="94A3B8"/>
-                </a:solidFill>
-                <a:latin typeface="微軟正黑體"/>
-              </a:defRPr>
-            </a:pPr>
-            <a:r>
-              <a:t>🎯 發表挑戰：看著自己的圖，不用看課本，流利說出這一段！</a:t>
+              <a:t>🏞️ 背景：操場、教室、新同學</a:t>
             </a:r>
           </a:p>
         </p:txBody>
